--- a/lessons/10-2/slides.pptx
+++ b/lessons/10-2/slides.pptx
@@ -10782,7 +10782,7 @@
       </p:sp>
       <p:sp>
         <p:nvSpPr>
-          <p:cNvPr id="20" name="Shape 18"/>
+          <p:cNvPr id="20" name="Text 18"/>
           <p:cNvSpPr/>
           <p:nvPr/>
         </p:nvSpPr>
@@ -10803,33 +10803,7 @@
             <a:solidFill>
               <a:srgbClr val="D6DBDF"/>
             </a:solidFill>
-            <a:prstDash val="solid"/>
           </a:ln>
-          <a:effectLst>
-            <a:outerShdw sx="100000" sy="100000" kx="0" ky="0" algn="bl" rotWithShape="0" blurRad="50800" dist="12700" dir="5400000">
-              <a:srgbClr val="1C2E42">
-                <a:alpha val="10000"/>
-              </a:srgbClr>
-            </a:outerShdw>
-          </a:effectLst>
-        </p:spPr>
-      </p:sp>
-      <p:sp>
-        <p:nvSpPr>
-          <p:cNvPr id="21" name="Text 19"/>
-          <p:cNvSpPr/>
-          <p:nvPr/>
-        </p:nvSpPr>
-        <p:spPr>
-          <a:xfrm>
-            <a:off x="685800" y="1481328"/>
-            <a:ext cx="1447800" cy="384048"/>
-          </a:xfrm>
-          <a:prstGeom prst="rect">
-            <a:avLst/>
-          </a:prstGeom>
-          <a:noFill/>
-          <a:ln/>
         </p:spPr>
         <p:txBody>
           <a:bodyPr wrap="square" rtlCol="0" anchor="ctr"/>
@@ -10839,7 +10813,7 @@
               <a:buNone/>
             </a:pPr>
             <a:r>
-              <a:rPr lang="en-US" sz="900" dirty="0">
+              <a:rPr lang="en-US" sz="900" b="1" dirty="0">
                 <a:solidFill>
                   <a:srgbClr val="17324D"/>
                 </a:solidFill>
@@ -10855,7 +10829,7 @@
       </p:sp>
       <p:sp>
         <p:nvSpPr>
-          <p:cNvPr id="22" name="Shape 20"/>
+          <p:cNvPr id="21" name="Text 19"/>
           <p:cNvSpPr/>
           <p:nvPr/>
         </p:nvSpPr>
@@ -10876,33 +10850,7 @@
             <a:solidFill>
               <a:srgbClr val="D6DBDF"/>
             </a:solidFill>
-            <a:prstDash val="solid"/>
           </a:ln>
-          <a:effectLst>
-            <a:outerShdw sx="100000" sy="100000" kx="0" ky="0" algn="bl" rotWithShape="0" blurRad="50800" dist="12700" dir="5400000">
-              <a:srgbClr val="1C2E42">
-                <a:alpha val="10000"/>
-              </a:srgbClr>
-            </a:outerShdw>
-          </a:effectLst>
-        </p:spPr>
-      </p:sp>
-      <p:sp>
-        <p:nvSpPr>
-          <p:cNvPr id="23" name="Text 21"/>
-          <p:cNvSpPr/>
-          <p:nvPr/>
-        </p:nvSpPr>
-        <p:spPr>
-          <a:xfrm>
-            <a:off x="2453640" y="1481328"/>
-            <a:ext cx="1447800" cy="384048"/>
-          </a:xfrm>
-          <a:prstGeom prst="rect">
-            <a:avLst/>
-          </a:prstGeom>
-          <a:noFill/>
-          <a:ln/>
         </p:spPr>
         <p:txBody>
           <a:bodyPr wrap="square" rtlCol="0" anchor="ctr"/>
@@ -10912,7 +10860,7 @@
               <a:buNone/>
             </a:pPr>
             <a:r>
-              <a:rPr lang="en-US" sz="900" dirty="0">
+              <a:rPr lang="en-US" sz="900" b="1" dirty="0">
                 <a:solidFill>
                   <a:srgbClr val="17324D"/>
                 </a:solidFill>
@@ -10928,7 +10876,7 @@
       </p:sp>
       <p:sp>
         <p:nvSpPr>
-          <p:cNvPr id="24" name="Shape 22"/>
+          <p:cNvPr id="22" name="Text 20"/>
           <p:cNvSpPr/>
           <p:nvPr/>
         </p:nvSpPr>
@@ -10949,33 +10897,7 @@
             <a:solidFill>
               <a:srgbClr val="D6DBDF"/>
             </a:solidFill>
-            <a:prstDash val="solid"/>
           </a:ln>
-          <a:effectLst>
-            <a:outerShdw sx="100000" sy="100000" kx="0" ky="0" algn="bl" rotWithShape="0" blurRad="50800" dist="12700" dir="5400000">
-              <a:srgbClr val="1C2E42">
-                <a:alpha val="10000"/>
-              </a:srgbClr>
-            </a:outerShdw>
-          </a:effectLst>
-        </p:spPr>
-      </p:sp>
-      <p:sp>
-        <p:nvSpPr>
-          <p:cNvPr id="25" name="Text 23"/>
-          <p:cNvSpPr/>
-          <p:nvPr/>
-        </p:nvSpPr>
-        <p:spPr>
-          <a:xfrm>
-            <a:off x="4221480" y="1481328"/>
-            <a:ext cx="1447800" cy="384048"/>
-          </a:xfrm>
-          <a:prstGeom prst="rect">
-            <a:avLst/>
-          </a:prstGeom>
-          <a:noFill/>
-          <a:ln/>
         </p:spPr>
         <p:txBody>
           <a:bodyPr wrap="square" rtlCol="0" anchor="ctr"/>
@@ -10985,7 +10907,7 @@
               <a:buNone/>
             </a:pPr>
             <a:r>
-              <a:rPr lang="en-US" sz="900" dirty="0">
+              <a:rPr lang="en-US" sz="900" b="1" dirty="0">
                 <a:solidFill>
                   <a:srgbClr val="17324D"/>
                 </a:solidFill>
@@ -11001,7 +10923,7 @@
       </p:sp>
       <p:sp>
         <p:nvSpPr>
-          <p:cNvPr id="26" name="Shape 24"/>
+          <p:cNvPr id="23" name="Text 21"/>
           <p:cNvSpPr/>
           <p:nvPr/>
         </p:nvSpPr>
@@ -11022,33 +10944,7 @@
             <a:solidFill>
               <a:srgbClr val="D6DBDF"/>
             </a:solidFill>
-            <a:prstDash val="solid"/>
           </a:ln>
-          <a:effectLst>
-            <a:outerShdw sx="100000" sy="100000" kx="0" ky="0" algn="bl" rotWithShape="0" blurRad="50800" dist="12700" dir="5400000">
-              <a:srgbClr val="1C2E42">
-                <a:alpha val="10000"/>
-              </a:srgbClr>
-            </a:outerShdw>
-          </a:effectLst>
-        </p:spPr>
-      </p:sp>
-      <p:sp>
-        <p:nvSpPr>
-          <p:cNvPr id="27" name="Text 25"/>
-          <p:cNvSpPr/>
-          <p:nvPr/>
-        </p:nvSpPr>
-        <p:spPr>
-          <a:xfrm>
-            <a:off x="685800" y="1975104"/>
-            <a:ext cx="1447800" cy="384048"/>
-          </a:xfrm>
-          <a:prstGeom prst="rect">
-            <a:avLst/>
-          </a:prstGeom>
-          <a:noFill/>
-          <a:ln/>
         </p:spPr>
         <p:txBody>
           <a:bodyPr wrap="square" rtlCol="0" anchor="ctr"/>
@@ -11058,7 +10954,7 @@
               <a:buNone/>
             </a:pPr>
             <a:r>
-              <a:rPr lang="en-US" sz="900" dirty="0">
+              <a:rPr lang="en-US" sz="900" b="1" dirty="0">
                 <a:solidFill>
                   <a:srgbClr val="17324D"/>
                 </a:solidFill>
@@ -11074,7 +10970,7 @@
       </p:sp>
       <p:sp>
         <p:nvSpPr>
-          <p:cNvPr id="28" name="Shape 26"/>
+          <p:cNvPr id="24" name="Shape 22"/>
           <p:cNvSpPr/>
           <p:nvPr/>
         </p:nvSpPr>
@@ -11108,7 +11004,7 @@
       </p:sp>
       <p:sp>
         <p:nvSpPr>
-          <p:cNvPr id="29" name="Text 27"/>
+          <p:cNvPr id="25" name="Text 23"/>
           <p:cNvSpPr/>
           <p:nvPr/>
         </p:nvSpPr>
@@ -11149,7 +11045,7 @@
       </p:sp>
       <p:sp>
         <p:nvSpPr>
-          <p:cNvPr id="30" name="Shape 28"/>
+          <p:cNvPr id="26" name="Shape 24"/>
           <p:cNvSpPr/>
           <p:nvPr/>
         </p:nvSpPr>
@@ -11183,7 +11079,7 @@
       </p:sp>
       <p:sp>
         <p:nvSpPr>
-          <p:cNvPr id="31" name="Text 29"/>
+          <p:cNvPr id="27" name="Text 25"/>
           <p:cNvSpPr/>
           <p:nvPr/>
         </p:nvSpPr>
@@ -11224,7 +11120,7 @@
       </p:sp>
       <p:sp>
         <p:nvSpPr>
-          <p:cNvPr id="32" name="Shape 30"/>
+          <p:cNvPr id="28" name="Shape 26"/>
           <p:cNvSpPr/>
           <p:nvPr/>
         </p:nvSpPr>
@@ -11258,7 +11154,7 @@
       </p:sp>
       <p:sp>
         <p:nvSpPr>
-          <p:cNvPr id="33" name="Text 31"/>
+          <p:cNvPr id="29" name="Text 27"/>
           <p:cNvSpPr/>
           <p:nvPr/>
         </p:nvSpPr>
@@ -11299,7 +11195,7 @@
       </p:sp>
       <p:sp>
         <p:nvSpPr>
-          <p:cNvPr id="34" name="Text 32"/>
+          <p:cNvPr id="30" name="Text 28"/>
           <p:cNvSpPr/>
           <p:nvPr/>
         </p:nvSpPr>
@@ -11338,7 +11234,7 @@
       </p:sp>
       <p:sp>
         <p:nvSpPr>
-          <p:cNvPr id="35" name="Shape 33"/>
+          <p:cNvPr id="31" name="Shape 29"/>
           <p:cNvSpPr/>
           <p:nvPr/>
         </p:nvSpPr>
@@ -11361,7 +11257,7 @@
       </p:sp>
       <p:sp>
         <p:nvSpPr>
-          <p:cNvPr id="36" name="Shape 34"/>
+          <p:cNvPr id="32" name="Shape 30"/>
           <p:cNvSpPr/>
           <p:nvPr/>
         </p:nvSpPr>
@@ -11384,7 +11280,7 @@
       </p:sp>
       <p:sp>
         <p:nvSpPr>
-          <p:cNvPr id="37" name="Shape 35"/>
+          <p:cNvPr id="33" name="Shape 31"/>
           <p:cNvSpPr/>
           <p:nvPr/>
         </p:nvSpPr>
@@ -11407,7 +11303,7 @@
       </p:sp>
       <p:sp>
         <p:nvSpPr>
-          <p:cNvPr id="38" name="Shape 36"/>
+          <p:cNvPr id="34" name="Shape 32"/>
           <p:cNvSpPr/>
           <p:nvPr/>
         </p:nvSpPr>
@@ -11430,7 +11326,7 @@
       </p:sp>
       <p:sp>
         <p:nvSpPr>
-          <p:cNvPr id="39" name="Shape 37"/>
+          <p:cNvPr id="35" name="Shape 33"/>
           <p:cNvSpPr/>
           <p:nvPr/>
         </p:nvSpPr>

--- a/lessons/10-2/slides.pptx
+++ b/lessons/10-2/slides.pptx
@@ -2584,7 +2584,7 @@
                 <a:ea typeface="Outfit" pitchFamily="34" charset="-122"/>
                 <a:cs typeface="Outfit" pitchFamily="34" charset="-120"/>
               </a:rPr>
-              <a:t>6.G.2</a:t>
+              <a:t>6.GR.2</a:t>
             </a:r>
             <a:endParaRPr lang="en-US" sz="1000" dirty="0"/>
           </a:p>
@@ -3307,7 +3307,7 @@
                 <a:ea typeface="Outfit" pitchFamily="34" charset="-122"/>
                 <a:cs typeface="Outfit" pitchFamily="34" charset="-120"/>
               </a:rPr>
-              <a:t>6.G.2</a:t>
+              <a:t>6.GR.2</a:t>
             </a:r>
             <a:endParaRPr lang="en-US" sz="900" dirty="0"/>
           </a:p>
@@ -4534,7 +4534,7 @@
                 <a:ea typeface="Outfit" pitchFamily="34" charset="-122"/>
                 <a:cs typeface="Outfit" pitchFamily="34" charset="-120"/>
               </a:rPr>
-              <a:t>6.G.2</a:t>
+              <a:t>6.GR.2</a:t>
             </a:r>
             <a:endParaRPr lang="en-US" sz="900" dirty="0"/>
           </a:p>
@@ -5644,7 +5644,7 @@
                 <a:ea typeface="Outfit" pitchFamily="34" charset="-122"/>
                 <a:cs typeface="Outfit" pitchFamily="34" charset="-120"/>
               </a:rPr>
-              <a:t>6.G.2</a:t>
+              <a:t>6.GR.2</a:t>
             </a:r>
             <a:endParaRPr lang="en-US" sz="900" dirty="0"/>
           </a:p>
@@ -6980,7 +6980,7 @@
                 <a:ea typeface="Outfit" pitchFamily="34" charset="-122"/>
                 <a:cs typeface="Outfit" pitchFamily="34" charset="-120"/>
               </a:rPr>
-              <a:t>6.G.2</a:t>
+              <a:t>6.GR.2</a:t>
             </a:r>
             <a:endParaRPr lang="en-US" sz="900" dirty="0"/>
           </a:p>
@@ -8274,7 +8274,7 @@
                 <a:ea typeface="Outfit" pitchFamily="34" charset="-122"/>
                 <a:cs typeface="Outfit" pitchFamily="34" charset="-120"/>
               </a:rPr>
-              <a:t>6.G.2</a:t>
+              <a:t>6.GR.2</a:t>
             </a:r>
             <a:endParaRPr lang="en-US" sz="900" dirty="0"/>
           </a:p>
@@ -9336,7 +9336,7 @@
                 <a:ea typeface="Outfit" pitchFamily="34" charset="-122"/>
                 <a:cs typeface="Outfit" pitchFamily="34" charset="-120"/>
               </a:rPr>
-              <a:t>6.G.2</a:t>
+              <a:t>6.GR.2</a:t>
             </a:r>
             <a:endParaRPr lang="en-US" sz="900" dirty="0"/>
           </a:p>
@@ -9800,7 +9800,7 @@
                 <a:ea typeface="Hanken Grotesk" pitchFamily="34" charset="-122"/>
                 <a:cs typeface="Hanken Grotesk" pitchFamily="34" charset="-120"/>
               </a:rPr>
-              <a:t>What is the volume of a rectangular prism with l = 4 in, w = 3 in, h = 5 in?</a:t>
+              <a:t>What is the volume of a prism with edge lengths 1/2 m, 3 m, and 4 m?</a:t>
             </a:r>
             <a:endParaRPr lang="en-US" sz="1050" dirty="0"/>
           </a:p>
@@ -9876,7 +9876,7 @@
                 <a:ea typeface="Hanken Grotesk" pitchFamily="34" charset="-122"/>
                 <a:cs typeface="Hanken Grotesk" pitchFamily="34" charset="-120"/>
               </a:rPr>
-              <a:t>A box has a volume of 36 cm³. Its length is 6 cm and width is 3 cm. What is the height?</a:t>
+              <a:t>A cube has an edge length of 5 cm. What is its volume?</a:t>
             </a:r>
             <a:endParaRPr lang="en-US" sz="1050" dirty="0"/>
           </a:p>
@@ -10301,7 +10301,7 @@
                 <a:ea typeface="Outfit" pitchFamily="34" charset="-122"/>
                 <a:cs typeface="Outfit" pitchFamily="34" charset="-120"/>
               </a:rPr>
-              <a:t>6.G.2</a:t>
+              <a:t>6.GR.2</a:t>
             </a:r>
             <a:endParaRPr lang="en-US" sz="900" dirty="0"/>
           </a:p>
@@ -11218,7 +11218,7 @@
                 <a:ea typeface="Outfit" pitchFamily="34" charset="-122"/>
                 <a:cs typeface="Outfit" pitchFamily="34" charset="-120"/>
               </a:rPr>
-              <a:t>6.G.2</a:t>
+              <a:t>6.GR.2</a:t>
             </a:r>
             <a:endParaRPr lang="en-US" sz="900" dirty="0"/>
           </a:p>
@@ -12346,7 +12346,7 @@
                 <a:ea typeface="Outfit" pitchFamily="34" charset="-122"/>
                 <a:cs typeface="Outfit" pitchFamily="34" charset="-120"/>
               </a:rPr>
-              <a:t>6.G.2</a:t>
+              <a:t>6.GR.2</a:t>
             </a:r>
             <a:endParaRPr lang="en-US" sz="900" dirty="0"/>
           </a:p>
@@ -13779,7 +13779,7 @@
                 <a:ea typeface="Outfit" pitchFamily="34" charset="-122"/>
                 <a:cs typeface="Outfit" pitchFamily="34" charset="-120"/>
               </a:rPr>
-              <a:t>6.G.2</a:t>
+              <a:t>6.GR.2</a:t>
             </a:r>
             <a:endParaRPr lang="en-US" sz="900" dirty="0"/>
           </a:p>
@@ -14593,7 +14593,7 @@
                 <a:ea typeface="Outfit" pitchFamily="34" charset="-122"/>
                 <a:cs typeface="Outfit" pitchFamily="34" charset="-120"/>
               </a:rPr>
-              <a:t>6.G.2</a:t>
+              <a:t>6.GR.2</a:t>
             </a:r>
             <a:endParaRPr lang="en-US" sz="900" dirty="0"/>
           </a:p>
@@ -15700,7 +15700,7 @@
                 <a:ea typeface="Outfit" pitchFamily="34" charset="-122"/>
                 <a:cs typeface="Outfit" pitchFamily="34" charset="-120"/>
               </a:rPr>
-              <a:t>6.G.2</a:t>
+              <a:t>6.GR.2</a:t>
             </a:r>
             <a:endParaRPr lang="en-US" sz="900" dirty="0"/>
           </a:p>
@@ -16807,7 +16807,7 @@
                 <a:ea typeface="Outfit" pitchFamily="34" charset="-122"/>
                 <a:cs typeface="Outfit" pitchFamily="34" charset="-120"/>
               </a:rPr>
-              <a:t>6.G.2</a:t>
+              <a:t>6.GR.2</a:t>
             </a:r>
             <a:endParaRPr lang="en-US" sz="900" dirty="0"/>
           </a:p>
@@ -17914,7 +17914,7 @@
                 <a:ea typeface="Outfit" pitchFamily="34" charset="-122"/>
                 <a:cs typeface="Outfit" pitchFamily="34" charset="-120"/>
               </a:rPr>
-              <a:t>6.G.2</a:t>
+              <a:t>6.GR.2</a:t>
             </a:r>
             <a:endParaRPr lang="en-US" sz="900" dirty="0"/>
           </a:p>
@@ -19021,7 +19021,7 @@
                 <a:ea typeface="Outfit" pitchFamily="34" charset="-122"/>
                 <a:cs typeface="Outfit" pitchFamily="34" charset="-120"/>
               </a:rPr>
-              <a:t>6.G.2</a:t>
+              <a:t>6.GR.2</a:t>
             </a:r>
             <a:endParaRPr lang="en-US" sz="900" dirty="0"/>
           </a:p>
@@ -20081,7 +20081,7 @@
                 <a:ea typeface="Outfit" pitchFamily="34" charset="-122"/>
                 <a:cs typeface="Outfit" pitchFamily="34" charset="-120"/>
               </a:rPr>
-              <a:t>6.G.2</a:t>
+              <a:t>6.GR.2</a:t>
             </a:r>
             <a:endParaRPr lang="en-US" sz="900" dirty="0"/>
           </a:p>
@@ -21069,7 +21069,7 @@
                 <a:ea typeface="Outfit" pitchFamily="34" charset="-122"/>
                 <a:cs typeface="Outfit" pitchFamily="34" charset="-120"/>
               </a:rPr>
-              <a:t>6.G.2</a:t>
+              <a:t>6.GR.2</a:t>
             </a:r>
             <a:endParaRPr lang="en-US" sz="900" dirty="0"/>
           </a:p>
